--- a/gtm/SLAM.SYSTEMS_GTM_Plan_EN.pptx
+++ b/gtm/SLAM.SYSTEMS_GTM_Plan_EN.pptx
@@ -16,6 +16,7 @@
     <p:sldId id="264" r:id="rId15"/>
     <p:sldId id="265" r:id="rId16"/>
     <p:sldId id="266" r:id="rId17"/>
+    <p:sldId id="267" r:id="rId18"/>
   </p:sldIdLst>
   <p:sldSz cx="12191695" cy="6858000" type="screen4x3"/>
   <p:notesSz cx="6858000" cy="9144000"/>
@@ -3450,7 +3451,7 @@
                 <a:latin typeface="Calibri"/>
                 <a:ea typeface="Calibri"/>
               </a:rPr>
-              <a:t>11 slides  ·  Operating version  ·  September 2026</a:t>
+              <a:t>12 slides  ·  Operating version  ·  September 2026</a:t>
             </a:r>
           </a:p>
         </p:txBody>
@@ -4496,7 +4497,7 @@
                 <a:latin typeface="Calibri"/>
                 <a:ea typeface="Calibri"/>
               </a:rPr>
-              <a:t>10 / 11</a:t>
+              <a:t>10 / 12</a:t>
             </a:r>
           </a:p>
         </p:txBody>
@@ -4643,7 +4644,1110 @@
                 <a:latin typeface="Calibri"/>
                 <a:ea typeface="Calibri"/>
               </a:rPr>
-              <a:t>10  /  What must be done in 90 days</a:t>
+              <a:t>10  /  Slam Agent</a:t>
+            </a:r>
+          </a:p>
+        </p:txBody>
+      </p:sp>
+      <p:sp>
+        <p:nvSpPr>
+          <p:cNvPr id="4" name="TextBox 3"/>
+          <p:cNvSpPr txBox="1"/>
+          <p:nvPr/>
+        </p:nvSpPr>
+        <p:spPr>
+          <a:xfrm>
+            <a:off x="566928" y="420624"/>
+            <a:ext cx="11064240" cy="384048"/>
+          </a:xfrm>
+          <a:prstGeom prst="rect">
+            <a:avLst/>
+          </a:prstGeom>
+          <a:noFill/>
+        </p:spPr>
+        <p:txBody>
+          <a:bodyPr wrap="square" anchor="t"/>
+          <a:lstStyle/>
+          <a:p>
+            <a:pPr algn="l">
+              <a:spcBef>
+                <a:spcPts val="0"/>
+              </a:spcBef>
+              <a:spcAft>
+                <a:spcPts val="0"/>
+              </a:spcAft>
+            </a:pPr>
+            <a:r>
+              <a:rPr sz="2200" b="1">
+                <a:solidFill>
+                  <a:srgbClr val="111111"/>
+                </a:solidFill>
+                <a:latin typeface="Calibri"/>
+                <a:ea typeface="Calibri"/>
+              </a:rPr>
+              <a:t>This autumn we still sell projects. Agent is the 2027 story, not this quarter’s SKU.</a:t>
+            </a:r>
+          </a:p>
+        </p:txBody>
+      </p:sp>
+      <p:sp>
+        <p:nvSpPr>
+          <p:cNvPr id="5" name="Rectangle 4"/>
+          <p:cNvSpPr/>
+          <p:nvPr/>
+        </p:nvSpPr>
+        <p:spPr>
+          <a:xfrm>
+            <a:off x="566928" y="841248"/>
+            <a:ext cx="384048" cy="38100"/>
+          </a:xfrm>
+          <a:prstGeom prst="rect">
+            <a:avLst/>
+          </a:prstGeom>
+          <a:solidFill>
+            <a:srgbClr val="FF004E"/>
+          </a:solidFill>
+          <a:ln>
+            <a:noFill/>
+          </a:ln>
+          <a:effectLst/>
+        </p:spPr>
+        <p:style>
+          <a:lnRef idx="1">
+            <a:schemeClr val="accent1"/>
+          </a:lnRef>
+          <a:fillRef idx="3">
+            <a:schemeClr val="accent1"/>
+          </a:fillRef>
+          <a:effectRef idx="2">
+            <a:schemeClr val="accent1"/>
+          </a:effectRef>
+          <a:fontRef idx="minor">
+            <a:schemeClr val="lt1"/>
+          </a:fontRef>
+        </p:style>
+        <p:txBody>
+          <a:bodyPr rtlCol="0" anchor="ctr"/>
+          <a:lstStyle/>
+          <a:p>
+            <a:pPr algn="ctr"/>
+          </a:p>
+        </p:txBody>
+      </p:sp>
+      <p:sp>
+        <p:nvSpPr>
+          <p:cNvPr id="6" name="Rectangle 5"/>
+          <p:cNvSpPr/>
+          <p:nvPr/>
+        </p:nvSpPr>
+        <p:spPr>
+          <a:xfrm>
+            <a:off x="566928" y="1078992"/>
+            <a:ext cx="2670048" cy="4160520"/>
+          </a:xfrm>
+          <a:prstGeom prst="rect">
+            <a:avLst/>
+          </a:prstGeom>
+          <a:solidFill>
+            <a:srgbClr val="F6F6F5"/>
+          </a:solidFill>
+          <a:ln>
+            <a:noFill/>
+          </a:ln>
+          <a:effectLst/>
+        </p:spPr>
+        <p:style>
+          <a:lnRef idx="1">
+            <a:schemeClr val="accent1"/>
+          </a:lnRef>
+          <a:fillRef idx="3">
+            <a:schemeClr val="accent1"/>
+          </a:fillRef>
+          <a:effectRef idx="2">
+            <a:schemeClr val="accent1"/>
+          </a:effectRef>
+          <a:fontRef idx="minor">
+            <a:schemeClr val="lt1"/>
+          </a:fontRef>
+        </p:style>
+        <p:txBody>
+          <a:bodyPr rtlCol="0" anchor="ctr"/>
+          <a:lstStyle/>
+          <a:p>
+            <a:pPr algn="ctr"/>
+          </a:p>
+        </p:txBody>
+      </p:sp>
+      <p:sp>
+        <p:nvSpPr>
+          <p:cNvPr id="7" name="TextBox 6"/>
+          <p:cNvSpPr txBox="1"/>
+          <p:nvPr/>
+        </p:nvSpPr>
+        <p:spPr>
+          <a:xfrm>
+            <a:off x="713232" y="1225296"/>
+            <a:ext cx="2377440" cy="365760"/>
+          </a:xfrm>
+          <a:prstGeom prst="rect">
+            <a:avLst/>
+          </a:prstGeom>
+          <a:noFill/>
+        </p:spPr>
+        <p:txBody>
+          <a:bodyPr wrap="square" anchor="t"/>
+          <a:lstStyle/>
+          <a:p>
+            <a:pPr algn="l">
+              <a:spcBef>
+                <a:spcPts val="0"/>
+              </a:spcBef>
+              <a:spcAft>
+                <a:spcPts val="0"/>
+              </a:spcAft>
+            </a:pPr>
+            <a:r>
+              <a:rPr sz="1600" b="1">
+                <a:solidFill>
+                  <a:srgbClr val="FF004E"/>
+                </a:solidFill>
+                <a:latin typeface="Calibri"/>
+                <a:ea typeface="Calibri"/>
+              </a:rPr>
+              <a:t>The shift</a:t>
+            </a:r>
+          </a:p>
+        </p:txBody>
+      </p:sp>
+      <p:sp>
+        <p:nvSpPr>
+          <p:cNvPr id="8" name="TextBox 7"/>
+          <p:cNvSpPr txBox="1"/>
+          <p:nvPr/>
+        </p:nvSpPr>
+        <p:spPr>
+          <a:xfrm>
+            <a:off x="713232" y="1664208"/>
+            <a:ext cx="2377440" cy="3383280"/>
+          </a:xfrm>
+          <a:prstGeom prst="rect">
+            <a:avLst/>
+          </a:prstGeom>
+          <a:noFill/>
+        </p:spPr>
+        <p:txBody>
+          <a:bodyPr wrap="square" anchor="t"/>
+          <a:lstStyle/>
+          <a:p>
+            <a:pPr algn="l">
+              <a:spcBef>
+                <a:spcPts val="0"/>
+              </a:spcBef>
+              <a:spcAft>
+                <a:spcPts val="0"/>
+              </a:spcAft>
+            </a:pPr>
+            <a:r>
+              <a:rPr sz="1300" b="0">
+                <a:solidFill>
+                  <a:srgbClr val="6B6B6B"/>
+                </a:solidFill>
+                <a:latin typeface="Calibri"/>
+                <a:ea typeface="Calibri"/>
+              </a:rPr>
+              <a:t>Package hardware + software as Slam Agent:</a:t>
+            </a:r>
+          </a:p>
+          <a:p>
+            <a:pPr algn="l">
+              <a:spcBef>
+                <a:spcPts val="0"/>
+              </a:spcBef>
+              <a:spcAft>
+                <a:spcPts val="0"/>
+              </a:spcAft>
+            </a:pPr>
+            <a:r>
+              <a:rPr sz="1300" b="0">
+                <a:solidFill>
+                  <a:srgbClr val="6B6B6B"/>
+                </a:solidFill>
+                <a:latin typeface="Calibri"/>
+                <a:ea typeface="Calibri"/>
+              </a:rPr>
+              <a:t>the intelligent proxy for a match night,</a:t>
+            </a:r>
+          </a:p>
+          <a:p>
+            <a:pPr algn="l">
+              <a:spcBef>
+                <a:spcPts val="0"/>
+              </a:spcBef>
+              <a:spcAft>
+                <a:spcPts val="0"/>
+              </a:spcAft>
+            </a:pPr>
+            <a:r>
+              <a:rPr sz="1300" b="0">
+                <a:solidFill>
+                  <a:srgbClr val="6B6B6B"/>
+                </a:solidFill>
+                <a:latin typeface="Calibri"/>
+                <a:ea typeface="Calibri"/>
+              </a:rPr>
+              <a:t>not just a scoreboard. This is how we</a:t>
+            </a:r>
+          </a:p>
+          <a:p>
+            <a:pPr algn="l">
+              <a:spcBef>
+                <a:spcPts val="0"/>
+              </a:spcBef>
+              <a:spcAft>
+                <a:spcPts val="0"/>
+              </a:spcAft>
+            </a:pPr>
+            <a:r>
+              <a:rPr sz="1300" b="0">
+                <a:solidFill>
+                  <a:srgbClr val="6B6B6B"/>
+                </a:solidFill>
+                <a:latin typeface="Calibri"/>
+                <a:ea typeface="Calibri"/>
+              </a:rPr>
+              <a:t>leave commodity LED behind.</a:t>
+            </a:r>
+          </a:p>
+        </p:txBody>
+      </p:sp>
+      <p:sp>
+        <p:nvSpPr>
+          <p:cNvPr id="9" name="Rectangle 8"/>
+          <p:cNvSpPr/>
+          <p:nvPr/>
+        </p:nvSpPr>
+        <p:spPr>
+          <a:xfrm>
+            <a:off x="3383280" y="1078992"/>
+            <a:ext cx="2670048" cy="4160520"/>
+          </a:xfrm>
+          <a:prstGeom prst="rect">
+            <a:avLst/>
+          </a:prstGeom>
+          <a:solidFill>
+            <a:srgbClr val="F6F6F5"/>
+          </a:solidFill>
+          <a:ln>
+            <a:noFill/>
+          </a:ln>
+          <a:effectLst/>
+        </p:spPr>
+        <p:style>
+          <a:lnRef idx="1">
+            <a:schemeClr val="accent1"/>
+          </a:lnRef>
+          <a:fillRef idx="3">
+            <a:schemeClr val="accent1"/>
+          </a:fillRef>
+          <a:effectRef idx="2">
+            <a:schemeClr val="accent1"/>
+          </a:effectRef>
+          <a:fontRef idx="minor">
+            <a:schemeClr val="lt1"/>
+          </a:fontRef>
+        </p:style>
+        <p:txBody>
+          <a:bodyPr rtlCol="0" anchor="ctr"/>
+          <a:lstStyle/>
+          <a:p>
+            <a:pPr algn="ctr"/>
+          </a:p>
+        </p:txBody>
+      </p:sp>
+      <p:sp>
+        <p:nvSpPr>
+          <p:cNvPr id="10" name="TextBox 9"/>
+          <p:cNvSpPr txBox="1"/>
+          <p:nvPr/>
+        </p:nvSpPr>
+        <p:spPr>
+          <a:xfrm>
+            <a:off x="3529584" y="1225296"/>
+            <a:ext cx="2377440" cy="365760"/>
+          </a:xfrm>
+          <a:prstGeom prst="rect">
+            <a:avLst/>
+          </a:prstGeom>
+          <a:noFill/>
+        </p:spPr>
+        <p:txBody>
+          <a:bodyPr wrap="square" anchor="t"/>
+          <a:lstStyle/>
+          <a:p>
+            <a:pPr algn="l">
+              <a:spcBef>
+                <a:spcPts val="0"/>
+              </a:spcBef>
+              <a:spcAft>
+                <a:spcPts val="0"/>
+              </a:spcAft>
+            </a:pPr>
+            <a:r>
+              <a:rPr sz="1600" b="1">
+                <a:solidFill>
+                  <a:srgbClr val="FF004E"/>
+                </a:solidFill>
+                <a:latin typeface="Calibri"/>
+                <a:ea typeface="Calibri"/>
+              </a:rPr>
+              <a:t>The path</a:t>
+            </a:r>
+          </a:p>
+        </p:txBody>
+      </p:sp>
+      <p:sp>
+        <p:nvSpPr>
+          <p:cNvPr id="11" name="TextBox 10"/>
+          <p:cNvSpPr txBox="1"/>
+          <p:nvPr/>
+        </p:nvSpPr>
+        <p:spPr>
+          <a:xfrm>
+            <a:off x="3529584" y="1664208"/>
+            <a:ext cx="2377440" cy="3383280"/>
+          </a:xfrm>
+          <a:prstGeom prst="rect">
+            <a:avLst/>
+          </a:prstGeom>
+          <a:noFill/>
+        </p:spPr>
+        <p:txBody>
+          <a:bodyPr wrap="square" anchor="t"/>
+          <a:lstStyle/>
+          <a:p>
+            <a:pPr algn="l">
+              <a:spcBef>
+                <a:spcPts val="0"/>
+              </a:spcBef>
+              <a:spcAft>
+                <a:spcPts val="0"/>
+              </a:spcAft>
+            </a:pPr>
+            <a:r>
+              <a:rPr sz="1300" b="0">
+                <a:solidFill>
+                  <a:srgbClr val="6B6B6B"/>
+                </a:solidFill>
+                <a:latin typeface="Calibri"/>
+                <a:ea typeface="Calibri"/>
+              </a:rPr>
+              <a:t>Open Linux gateway. Voice to lights</a:t>
+            </a:r>
+          </a:p>
+          <a:p>
+            <a:pPr algn="l">
+              <a:spcBef>
+                <a:spcPts val="0"/>
+              </a:spcBef>
+              <a:spcAft>
+                <a:spcPts val="0"/>
+              </a:spcAft>
+            </a:pPr>
+            <a:r>
+              <a:rPr sz="1300" b="0">
+                <a:solidFill>
+                  <a:srgbClr val="6B6B6B"/>
+                </a:solidFill>
+                <a:latin typeface="Calibri"/>
+                <a:ea typeface="Calibri"/>
+              </a:rPr>
+              <a:t>and ad playlists. Natural language:</a:t>
+            </a:r>
+          </a:p>
+          <a:p>
+            <a:pPr algn="l">
+              <a:spcBef>
+                <a:spcPts val="0"/>
+              </a:spcBef>
+              <a:spcAft>
+                <a:spcPts val="0"/>
+              </a:spcAft>
+            </a:pPr>
+            <a:r>
+              <a:rPr sz="1300" b="0">
+                <a:solidFill>
+                  <a:srgbClr val="6B6B6B"/>
+                </a:solidFill>
+                <a:latin typeface="Calibri"/>
+                <a:ea typeface="Calibri"/>
+              </a:rPr>
+              <a:t>“hold the next timeout ad.”</a:t>
+            </a:r>
+          </a:p>
+          <a:p>
+            <a:pPr algn="l">
+              <a:spcBef>
+                <a:spcPts val="0"/>
+              </a:spcBef>
+              <a:spcAft>
+                <a:spcPts val="0"/>
+              </a:spcAft>
+            </a:pPr>
+            <a:r>
+              <a:rPr sz="1300" b="0">
+                <a:solidFill>
+                  <a:srgbClr val="6B6B6B"/>
+                </a:solidFill>
+                <a:latin typeface="Calibri"/>
+                <a:ea typeface="Calibri"/>
+              </a:rPr>
+              <a:t>Demo first. Then put it on the site.</a:t>
+            </a:r>
+          </a:p>
+        </p:txBody>
+      </p:sp>
+      <p:sp>
+        <p:nvSpPr>
+          <p:cNvPr id="12" name="Rectangle 11"/>
+          <p:cNvSpPr/>
+          <p:nvPr/>
+        </p:nvSpPr>
+        <p:spPr>
+          <a:xfrm>
+            <a:off x="6199632" y="1078992"/>
+            <a:ext cx="2670048" cy="4160520"/>
+          </a:xfrm>
+          <a:prstGeom prst="rect">
+            <a:avLst/>
+          </a:prstGeom>
+          <a:solidFill>
+            <a:srgbClr val="F6F6F5"/>
+          </a:solidFill>
+          <a:ln>
+            <a:noFill/>
+          </a:ln>
+          <a:effectLst/>
+        </p:spPr>
+        <p:style>
+          <a:lnRef idx="1">
+            <a:schemeClr val="accent1"/>
+          </a:lnRef>
+          <a:fillRef idx="3">
+            <a:schemeClr val="accent1"/>
+          </a:fillRef>
+          <a:effectRef idx="2">
+            <a:schemeClr val="accent1"/>
+          </a:effectRef>
+          <a:fontRef idx="minor">
+            <a:schemeClr val="lt1"/>
+          </a:fontRef>
+        </p:style>
+        <p:txBody>
+          <a:bodyPr rtlCol="0" anchor="ctr"/>
+          <a:lstStyle/>
+          <a:p>
+            <a:pPr algn="ctr"/>
+          </a:p>
+        </p:txBody>
+      </p:sp>
+      <p:sp>
+        <p:nvSpPr>
+          <p:cNvPr id="13" name="TextBox 12"/>
+          <p:cNvSpPr txBox="1"/>
+          <p:nvPr/>
+        </p:nvSpPr>
+        <p:spPr>
+          <a:xfrm>
+            <a:off x="6345936" y="1225296"/>
+            <a:ext cx="2377440" cy="365760"/>
+          </a:xfrm>
+          <a:prstGeom prst="rect">
+            <a:avLst/>
+          </a:prstGeom>
+          <a:noFill/>
+        </p:spPr>
+        <p:txBody>
+          <a:bodyPr wrap="square" anchor="t"/>
+          <a:lstStyle/>
+          <a:p>
+            <a:pPr algn="l">
+              <a:spcBef>
+                <a:spcPts val="0"/>
+              </a:spcBef>
+              <a:spcAft>
+                <a:spcPts val="0"/>
+              </a:spcAft>
+            </a:pPr>
+            <a:r>
+              <a:rPr sz="1600" b="1">
+                <a:solidFill>
+                  <a:srgbClr val="FF004E"/>
+                </a:solidFill>
+                <a:latin typeface="Calibri"/>
+                <a:ea typeface="Calibri"/>
+              </a:rPr>
+              <a:t>The room</a:t>
+            </a:r>
+          </a:p>
+        </p:txBody>
+      </p:sp>
+      <p:sp>
+        <p:nvSpPr>
+          <p:cNvPr id="14" name="TextBox 13"/>
+          <p:cNvSpPr txBox="1"/>
+          <p:nvPr/>
+        </p:nvSpPr>
+        <p:spPr>
+          <a:xfrm>
+            <a:off x="6345936" y="1664208"/>
+            <a:ext cx="2377440" cy="3383280"/>
+          </a:xfrm>
+          <a:prstGeom prst="rect">
+            <a:avLst/>
+          </a:prstGeom>
+          <a:noFill/>
+        </p:spPr>
+        <p:txBody>
+          <a:bodyPr wrap="square" anchor="t"/>
+          <a:lstStyle/>
+          <a:p>
+            <a:pPr algn="l">
+              <a:spcBef>
+                <a:spcPts val="0"/>
+              </a:spcBef>
+              <a:spcAft>
+                <a:spcPts val="0"/>
+              </a:spcAft>
+            </a:pPr>
+            <a:r>
+              <a:rPr sz="1300" b="0">
+                <a:solidFill>
+                  <a:srgbClr val="6B6B6B"/>
+                </a:solidFill>
+                <a:latin typeface="Calibri"/>
+                <a:ea typeface="Calibri"/>
+              </a:rPr>
+              <a:t>Sense the arena: applause triggers a light cue.</a:t>
+            </a:r>
+          </a:p>
+          <a:p>
+            <a:pPr algn="l">
+              <a:spcBef>
+                <a:spcPts val="0"/>
+              </a:spcBef>
+              <a:spcAft>
+                <a:spcPts val="0"/>
+              </a:spcAft>
+            </a:pPr>
+            <a:r>
+              <a:rPr sz="1300" b="0">
+                <a:solidFill>
+                  <a:srgbClr val="6B6B6B"/>
+                </a:solidFill>
+                <a:latin typeface="Calibri"/>
+                <a:ea typeface="Calibri"/>
+              </a:rPr>
+              <a:t>Not a fan toy. Show integrators the system</a:t>
+            </a:r>
+          </a:p>
+          <a:p>
+            <a:pPr algn="l">
+              <a:spcBef>
+                <a:spcPts val="0"/>
+              </a:spcBef>
+              <a:spcAft>
+                <a:spcPts val="0"/>
+              </a:spcAft>
+            </a:pPr>
+            <a:r>
+              <a:rPr sz="1300" b="0">
+                <a:solidFill>
+                  <a:srgbClr val="6B6B6B"/>
+                </a:solidFill>
+                <a:latin typeface="Calibri"/>
+                <a:ea typeface="Calibri"/>
+              </a:rPr>
+              <a:t>reacts to the match.</a:t>
+            </a:r>
+          </a:p>
+        </p:txBody>
+      </p:sp>
+      <p:sp>
+        <p:nvSpPr>
+          <p:cNvPr id="15" name="Rectangle 14"/>
+          <p:cNvSpPr/>
+          <p:nvPr/>
+        </p:nvSpPr>
+        <p:spPr>
+          <a:xfrm>
+            <a:off x="9015984" y="1078992"/>
+            <a:ext cx="2670048" cy="4160520"/>
+          </a:xfrm>
+          <a:prstGeom prst="rect">
+            <a:avLst/>
+          </a:prstGeom>
+          <a:solidFill>
+            <a:srgbClr val="F6F6F5"/>
+          </a:solidFill>
+          <a:ln>
+            <a:noFill/>
+          </a:ln>
+          <a:effectLst/>
+        </p:spPr>
+        <p:style>
+          <a:lnRef idx="1">
+            <a:schemeClr val="accent1"/>
+          </a:lnRef>
+          <a:fillRef idx="3">
+            <a:schemeClr val="accent1"/>
+          </a:fillRef>
+          <a:effectRef idx="2">
+            <a:schemeClr val="accent1"/>
+          </a:effectRef>
+          <a:fontRef idx="minor">
+            <a:schemeClr val="lt1"/>
+          </a:fontRef>
+        </p:style>
+        <p:txBody>
+          <a:bodyPr rtlCol="0" anchor="ctr"/>
+          <a:lstStyle/>
+          <a:p>
+            <a:pPr algn="ctr"/>
+          </a:p>
+        </p:txBody>
+      </p:sp>
+      <p:sp>
+        <p:nvSpPr>
+          <p:cNvPr id="16" name="TextBox 15"/>
+          <p:cNvSpPr txBox="1"/>
+          <p:nvPr/>
+        </p:nvSpPr>
+        <p:spPr>
+          <a:xfrm>
+            <a:off x="9162288" y="1225296"/>
+            <a:ext cx="2377440" cy="365760"/>
+          </a:xfrm>
+          <a:prstGeom prst="rect">
+            <a:avLst/>
+          </a:prstGeom>
+          <a:noFill/>
+        </p:spPr>
+        <p:txBody>
+          <a:bodyPr wrap="square" anchor="t"/>
+          <a:lstStyle/>
+          <a:p>
+            <a:pPr algn="l">
+              <a:spcBef>
+                <a:spcPts val="0"/>
+              </a:spcBef>
+              <a:spcAft>
+                <a:spcPts val="0"/>
+              </a:spcAft>
+            </a:pPr>
+            <a:r>
+              <a:rPr sz="1600" b="1">
+                <a:solidFill>
+                  <a:srgbClr val="FF004E"/>
+                </a:solidFill>
+                <a:latin typeface="Calibri"/>
+                <a:ea typeface="Calibri"/>
+              </a:rPr>
+              <a:t>The intake</a:t>
+            </a:r>
+          </a:p>
+        </p:txBody>
+      </p:sp>
+      <p:sp>
+        <p:nvSpPr>
+          <p:cNvPr id="17" name="TextBox 16"/>
+          <p:cNvSpPr txBox="1"/>
+          <p:nvPr/>
+        </p:nvSpPr>
+        <p:spPr>
+          <a:xfrm>
+            <a:off x="9162288" y="1664208"/>
+            <a:ext cx="2377440" cy="3383280"/>
+          </a:xfrm>
+          <a:prstGeom prst="rect">
+            <a:avLst/>
+          </a:prstGeom>
+          <a:noFill/>
+        </p:spPr>
+        <p:txBody>
+          <a:bodyPr wrap="square" anchor="t"/>
+          <a:lstStyle/>
+          <a:p>
+            <a:pPr algn="l">
+              <a:spcBef>
+                <a:spcPts val="0"/>
+              </a:spcBef>
+              <a:spcAft>
+                <a:spcPts val="0"/>
+              </a:spcAft>
+            </a:pPr>
+            <a:r>
+              <a:rPr sz="1300" b="0">
+                <a:solidFill>
+                  <a:srgbClr val="6B6B6B"/>
+                </a:solidFill>
+                <a:latin typeface="Calibri"/>
+                <a:ea typeface="Calibri"/>
+              </a:rPr>
+              <a:t>A Custom AI Solution door on Solutions.</a:t>
+            </a:r>
+          </a:p>
+          <a:p>
+            <a:pPr algn="l">
+              <a:spcBef>
+                <a:spcPts val="0"/>
+              </a:spcBef>
+              <a:spcAft>
+                <a:spcPts val="0"/>
+              </a:spcAft>
+            </a:pPr>
+            <a:r>
+              <a:rPr sz="1300" b="0">
+                <a:solidFill>
+                  <a:srgbClr val="6B6B6B"/>
+                </a:solidFill>
+                <a:latin typeface="Calibri"/>
+                <a:ea typeface="Calibri"/>
+              </a:rPr>
+              <a:t>Ask for stats, ticketing, lighting plots.</a:t>
+            </a:r>
+          </a:p>
+          <a:p>
+            <a:pPr algn="l">
+              <a:spcBef>
+                <a:spcPts val="0"/>
+              </a:spcBef>
+              <a:spcAft>
+                <a:spcPts val="0"/>
+              </a:spcAft>
+            </a:pPr>
+            <a:r>
+              <a:rPr sz="1300" b="0">
+                <a:solidFill>
+                  <a:srgbClr val="6B6B6B"/>
+                </a:solidFill>
+                <a:latin typeface="Calibri"/>
+                <a:ea typeface="Calibri"/>
+              </a:rPr>
+              <a:t>Collect demand. Do not fake shipping.</a:t>
+            </a:r>
+          </a:p>
+        </p:txBody>
+      </p:sp>
+      <p:sp>
+        <p:nvSpPr>
+          <p:cNvPr id="18" name="Rectangle 17"/>
+          <p:cNvSpPr/>
+          <p:nvPr/>
+        </p:nvSpPr>
+        <p:spPr>
+          <a:xfrm>
+            <a:off x="566928" y="5413248"/>
+            <a:ext cx="11045952" cy="896112"/>
+          </a:xfrm>
+          <a:prstGeom prst="rect">
+            <a:avLst/>
+          </a:prstGeom>
+          <a:solidFill>
+            <a:srgbClr val="111111"/>
+          </a:solidFill>
+          <a:ln>
+            <a:noFill/>
+          </a:ln>
+          <a:effectLst/>
+        </p:spPr>
+        <p:style>
+          <a:lnRef idx="1">
+            <a:schemeClr val="accent1"/>
+          </a:lnRef>
+          <a:fillRef idx="3">
+            <a:schemeClr val="accent1"/>
+          </a:fillRef>
+          <a:effectRef idx="2">
+            <a:schemeClr val="accent1"/>
+          </a:effectRef>
+          <a:fontRef idx="minor">
+            <a:schemeClr val="lt1"/>
+          </a:fontRef>
+        </p:style>
+        <p:txBody>
+          <a:bodyPr rtlCol="0" anchor="ctr"/>
+          <a:lstStyle/>
+          <a:p>
+            <a:pPr algn="ctr"/>
+          </a:p>
+        </p:txBody>
+      </p:sp>
+      <p:sp>
+        <p:nvSpPr>
+          <p:cNvPr id="19" name="TextBox 18"/>
+          <p:cNvSpPr txBox="1"/>
+          <p:nvPr/>
+        </p:nvSpPr>
+        <p:spPr>
+          <a:xfrm>
+            <a:off x="749808" y="5541264"/>
+            <a:ext cx="10698480" cy="658368"/>
+          </a:xfrm>
+          <a:prstGeom prst="rect">
+            <a:avLst/>
+          </a:prstGeom>
+          <a:noFill/>
+        </p:spPr>
+        <p:txBody>
+          <a:bodyPr wrap="square" anchor="ctr"/>
+          <a:lstStyle/>
+          <a:p>
+            <a:pPr algn="l">
+              <a:spcBef>
+                <a:spcPts val="0"/>
+              </a:spcBef>
+              <a:spcAft>
+                <a:spcPts val="0"/>
+              </a:spcAft>
+            </a:pPr>
+            <a:r>
+              <a:rPr sz="1400" b="0">
+                <a:solidFill>
+                  <a:srgbClr val="FFFFFF"/>
+                </a:solidFill>
+                <a:latin typeface="Calibri"/>
+                <a:ea typeface="Calibri"/>
+              </a:rPr>
+              <a:t>Rule: the German site this autumn still sells one-operator SCORE + LED. Agent lives in briefings, LinkedIn and closed rooms — it does not replace product names.</a:t>
+            </a:r>
+          </a:p>
+        </p:txBody>
+      </p:sp>
+      <p:sp>
+        <p:nvSpPr>
+          <p:cNvPr id="20" name="TextBox 19"/>
+          <p:cNvSpPr txBox="1"/>
+          <p:nvPr/>
+        </p:nvSpPr>
+        <p:spPr>
+          <a:xfrm>
+            <a:off x="566928" y="6565392"/>
+            <a:ext cx="7315200" cy="219456"/>
+          </a:xfrm>
+          <a:prstGeom prst="rect">
+            <a:avLst/>
+          </a:prstGeom>
+          <a:noFill/>
+        </p:spPr>
+        <p:txBody>
+          <a:bodyPr wrap="square" anchor="t"/>
+          <a:lstStyle/>
+          <a:p>
+            <a:pPr algn="l">
+              <a:spcBef>
+                <a:spcPts val="0"/>
+              </a:spcBef>
+              <a:spcAft>
+                <a:spcPts val="0"/>
+              </a:spcAft>
+            </a:pPr>
+            <a:r>
+              <a:rPr sz="1000" b="0">
+                <a:solidFill>
+                  <a:srgbClr val="6B6B6B"/>
+                </a:solidFill>
+                <a:latin typeface="Calibri"/>
+                <a:ea typeface="Calibri"/>
+              </a:rPr>
+              <a:t>SLAM.SYSTEMS  ·  GTM 2026 Q4 – 2027 Q1</a:t>
+            </a:r>
+          </a:p>
+        </p:txBody>
+      </p:sp>
+      <p:sp>
+        <p:nvSpPr>
+          <p:cNvPr id="21" name="TextBox 20"/>
+          <p:cNvSpPr txBox="1"/>
+          <p:nvPr/>
+        </p:nvSpPr>
+        <p:spPr>
+          <a:xfrm>
+            <a:off x="10241280" y="6565392"/>
+            <a:ext cx="1371600" cy="219456"/>
+          </a:xfrm>
+          <a:prstGeom prst="rect">
+            <a:avLst/>
+          </a:prstGeom>
+          <a:noFill/>
+        </p:spPr>
+        <p:txBody>
+          <a:bodyPr wrap="square" anchor="t"/>
+          <a:lstStyle/>
+          <a:p>
+            <a:pPr algn="r">
+              <a:spcBef>
+                <a:spcPts val="0"/>
+              </a:spcBef>
+              <a:spcAft>
+                <a:spcPts val="0"/>
+              </a:spcAft>
+            </a:pPr>
+            <a:r>
+              <a:rPr sz="1000" b="0">
+                <a:solidFill>
+                  <a:srgbClr val="6B6B6B"/>
+                </a:solidFill>
+                <a:latin typeface="Calibri"/>
+                <a:ea typeface="Calibri"/>
+              </a:rPr>
+              <a:t>11 / 12</a:t>
+            </a:r>
+          </a:p>
+        </p:txBody>
+      </p:sp>
+      <p:sp>
+        <p:nvSpPr>
+          <p:cNvPr id="22" name="Rectangle 21"/>
+          <p:cNvSpPr/>
+          <p:nvPr/>
+        </p:nvSpPr>
+        <p:spPr>
+          <a:xfrm>
+            <a:off x="566928" y="6510528"/>
+            <a:ext cx="11045952" cy="9525"/>
+          </a:xfrm>
+          <a:prstGeom prst="rect">
+            <a:avLst/>
+          </a:prstGeom>
+          <a:solidFill>
+            <a:srgbClr val="E6E6E6"/>
+          </a:solidFill>
+          <a:ln>
+            <a:noFill/>
+          </a:ln>
+          <a:effectLst/>
+        </p:spPr>
+        <p:style>
+          <a:lnRef idx="1">
+            <a:schemeClr val="accent1"/>
+          </a:lnRef>
+          <a:fillRef idx="3">
+            <a:schemeClr val="accent1"/>
+          </a:fillRef>
+          <a:effectRef idx="2">
+            <a:schemeClr val="accent1"/>
+          </a:effectRef>
+          <a:fontRef idx="minor">
+            <a:schemeClr val="lt1"/>
+          </a:fontRef>
+        </p:style>
+        <p:txBody>
+          <a:bodyPr rtlCol="0" anchor="ctr"/>
+          <a:lstStyle/>
+          <a:p>
+            <a:pPr algn="ctr"/>
+          </a:p>
+        </p:txBody>
+      </p:sp>
+    </p:spTree>
+  </p:cSld>
+  <p:clrMapOvr>
+    <a:masterClrMapping/>
+  </p:clrMapOvr>
+</p:sld>
+</file>
+
+<file path=ppt/slides/slide12.xml><?xml version="1.0" encoding="utf-8"?>
+<p:sld xmlns:a="http://schemas.openxmlformats.org/drawingml/2006/main" xmlns:p="http://schemas.openxmlformats.org/presentationml/2006/main" xmlns:r="http://schemas.openxmlformats.org/officeDocument/2006/relationships">
+  <p:cSld>
+    <p:spTree>
+      <p:nvGrpSpPr>
+        <p:cNvPr id="1" name=""/>
+        <p:cNvGrpSpPr/>
+        <p:nvPr/>
+      </p:nvGrpSpPr>
+      <p:grpSpPr/>
+      <p:sp>
+        <p:nvSpPr>
+          <p:cNvPr id="2" name="Rectangle 1"/>
+          <p:cNvSpPr/>
+          <p:nvPr/>
+        </p:nvSpPr>
+        <p:spPr>
+          <a:xfrm>
+            <a:off x="0" y="0"/>
+            <a:ext cx="12191695" cy="6858000"/>
+          </a:xfrm>
+          <a:prstGeom prst="rect">
+            <a:avLst/>
+          </a:prstGeom>
+          <a:solidFill>
+            <a:srgbClr val="FFFFFF"/>
+          </a:solidFill>
+          <a:ln>
+            <a:noFill/>
+          </a:ln>
+          <a:effectLst/>
+        </p:spPr>
+        <p:style>
+          <a:lnRef idx="1">
+            <a:schemeClr val="accent1"/>
+          </a:lnRef>
+          <a:fillRef idx="3">
+            <a:schemeClr val="accent1"/>
+          </a:fillRef>
+          <a:effectRef idx="2">
+            <a:schemeClr val="accent1"/>
+          </a:effectRef>
+          <a:fontRef idx="minor">
+            <a:schemeClr val="lt1"/>
+          </a:fontRef>
+        </p:style>
+        <p:txBody>
+          <a:bodyPr rtlCol="0" anchor="ctr"/>
+          <a:lstStyle/>
+          <a:p>
+            <a:pPr algn="ctr"/>
+          </a:p>
+        </p:txBody>
+      </p:sp>
+      <p:sp>
+        <p:nvSpPr>
+          <p:cNvPr id="3" name="TextBox 2"/>
+          <p:cNvSpPr txBox="1"/>
+          <p:nvPr/>
+        </p:nvSpPr>
+        <p:spPr>
+          <a:xfrm>
+            <a:off x="566928" y="219456"/>
+            <a:ext cx="10972800" cy="201168"/>
+          </a:xfrm>
+          <a:prstGeom prst="rect">
+            <a:avLst/>
+          </a:prstGeom>
+          <a:noFill/>
+        </p:spPr>
+        <p:txBody>
+          <a:bodyPr wrap="square" anchor="t"/>
+          <a:lstStyle/>
+          <a:p>
+            <a:pPr algn="l">
+              <a:spcBef>
+                <a:spcPts val="0"/>
+              </a:spcBef>
+              <a:spcAft>
+                <a:spcPts val="0"/>
+              </a:spcAft>
+            </a:pPr>
+            <a:r>
+              <a:rPr sz="1100" b="1">
+                <a:solidFill>
+                  <a:srgbClr val="FF004E"/>
+                </a:solidFill>
+                <a:latin typeface="Calibri"/>
+                <a:ea typeface="Calibri"/>
+              </a:rPr>
+              <a:t>11  /  What must be done in 90 days</a:t>
             </a:r>
           </a:p>
         </p:txBody>
@@ -5772,7 +6876,7 @@
                 <a:latin typeface="Calibri"/>
                 <a:ea typeface="Calibri"/>
               </a:rPr>
-              <a:t>EN+ZH home / social first posts</a:t>
+              <a:t>EN+ZH home / LI+IG first posts</a:t>
             </a:r>
           </a:p>
         </p:txBody>
@@ -6033,7 +7137,7 @@
                 <a:latin typeface="Calibri"/>
                 <a:ea typeface="Calibri"/>
               </a:rPr>
-              <a:t>3 langs + 3 accounts</a:t>
+              <a:t>2 accounts live</a:t>
             </a:r>
           </a:p>
         </p:txBody>
@@ -6207,7 +7311,7 @@
                 <a:latin typeface="Calibri"/>
                 <a:ea typeface="Calibri"/>
               </a:rPr>
-              <a:t>Three films on the site</a:t>
+              <a:t>7s SCORE film + form jump</a:t>
             </a:r>
           </a:p>
         </p:txBody>
@@ -6294,7 +7398,7 @@
                 <a:latin typeface="Calibri"/>
                 <a:ea typeface="Calibri"/>
               </a:rPr>
-              <a:t>Social · Email</a:t>
+              <a:t>Site · Video</a:t>
             </a:r>
           </a:p>
         </p:txBody>
@@ -6468,7 +7572,7 @@
                 <a:latin typeface="Calibri"/>
                 <a:ea typeface="Calibri"/>
               </a:rPr>
-              <a:t>60s+30s+30s</a:t>
+              <a:t>7s → form</a:t>
             </a:r>
           </a:p>
         </p:txBody>
@@ -9680,7 +10784,7 @@
                 <a:latin typeface="Calibri"/>
                 <a:ea typeface="Calibri"/>
               </a:rPr>
-              <a:t>11 / 11</a:t>
+              <a:t>12 / 12</a:t>
             </a:r>
           </a:p>
         </p:txBody>
@@ -10867,7 +11971,7 @@
                 <a:latin typeface="Calibri"/>
                 <a:ea typeface="Calibri"/>
               </a:rPr>
-              <a:t>2 / 11</a:t>
+              <a:t>2 / 12</a:t>
             </a:r>
           </a:p>
         </p:txBody>
@@ -13460,7 +14564,7 @@
                 <a:latin typeface="Calibri"/>
                 <a:ea typeface="Calibri"/>
               </a:rPr>
-              <a:t>3 / 11</a:t>
+              <a:t>3 / 12</a:t>
             </a:r>
           </a:p>
         </p:txBody>
@@ -14559,7 +15663,7 @@
                 <a:latin typeface="Calibri"/>
                 <a:ea typeface="Calibri"/>
               </a:rPr>
-              <a:t>4 / 11</a:t>
+              <a:t>4 / 12</a:t>
             </a:r>
           </a:p>
         </p:txBody>
@@ -15459,7 +16563,7 @@
                 <a:latin typeface="Calibri"/>
                 <a:ea typeface="Calibri"/>
               </a:rPr>
-              <a:t>Three films, one project PDF. Every mail, post and show QR lands here.</a:t>
+              <a:t>7s SCORE film ends on the form (subject Scoreboard Handball). Then system/LED films and a project PDF.</a:t>
             </a:r>
           </a:p>
         </p:txBody>
@@ -15913,7 +17017,7 @@
                 <a:latin typeface="Calibri"/>
                 <a:ea typeface="Calibri"/>
               </a:rPr>
-              <a:t>5 / 11</a:t>
+              <a:t>5 / 12</a:t>
             </a:r>
           </a:p>
         </p:txBody>
@@ -16101,7 +17205,7 @@
                 <a:latin typeface="Calibri"/>
                 <a:ea typeface="Calibri"/>
               </a:rPr>
-              <a:t>Three channels. Post the match, not the spec. Spike around shows.</a:t>
+              <a:t>Prove two channels first. Swiss SIM. Post the match, not the spec.</a:t>
             </a:r>
           </a:p>
         </p:txBody>
@@ -16159,7 +17263,7 @@
         <p:spPr>
           <a:xfrm>
             <a:off x="566928" y="1024128"/>
-            <a:ext cx="1554480" cy="960120"/>
+            <a:ext cx="1691640" cy="749808"/>
           </a:xfrm>
           <a:prstGeom prst="rect">
             <a:avLst/>
@@ -16205,7 +17309,7 @@
         <p:spPr>
           <a:xfrm>
             <a:off x="640080" y="1060704"/>
-            <a:ext cx="1408176" cy="905256"/>
+            <a:ext cx="1545336" cy="694944"/>
           </a:xfrm>
           <a:prstGeom prst="rect">
             <a:avLst/>
@@ -16245,8 +17349,8 @@
         </p:nvSpPr>
         <p:spPr>
           <a:xfrm>
-            <a:off x="2121408" y="1024128"/>
-            <a:ext cx="2240280" cy="960120"/>
+            <a:off x="2258568" y="1024128"/>
+            <a:ext cx="2148840" cy="749808"/>
           </a:xfrm>
           <a:prstGeom prst="rect">
             <a:avLst/>
@@ -16291,8 +17395,8 @@
         </p:nvSpPr>
         <p:spPr>
           <a:xfrm>
-            <a:off x="2194560" y="1060704"/>
-            <a:ext cx="2093976" cy="905256"/>
+            <a:off x="2331720" y="1060704"/>
+            <a:ext cx="2002536" cy="694944"/>
           </a:xfrm>
           <a:prstGeom prst="rect">
             <a:avLst/>
@@ -16319,7 +17423,7 @@
                 <a:latin typeface="Calibri"/>
                 <a:ea typeface="Calibri"/>
               </a:rPr>
-              <a:t>Why</a:t>
+              <a:t>Phase</a:t>
             </a:r>
           </a:p>
         </p:txBody>
@@ -16332,8 +17436,8 @@
         </p:nvSpPr>
         <p:spPr>
           <a:xfrm>
-            <a:off x="4361688" y="1024128"/>
-            <a:ext cx="3154680" cy="960120"/>
+            <a:off x="4407408" y="1024128"/>
+            <a:ext cx="3063240" cy="749808"/>
           </a:xfrm>
           <a:prstGeom prst="rect">
             <a:avLst/>
@@ -16378,8 +17482,8 @@
         </p:nvSpPr>
         <p:spPr>
           <a:xfrm>
-            <a:off x="4434840" y="1060704"/>
-            <a:ext cx="3008376" cy="905256"/>
+            <a:off x="4480560" y="1060704"/>
+            <a:ext cx="2916936" cy="694944"/>
           </a:xfrm>
           <a:prstGeom prst="rect">
             <a:avLst/>
@@ -16419,8 +17523,8 @@
         </p:nvSpPr>
         <p:spPr>
           <a:xfrm>
-            <a:off x="7516368" y="1024128"/>
-            <a:ext cx="1828800" cy="960120"/>
+            <a:off x="7470648" y="1024128"/>
+            <a:ext cx="1965960" cy="749808"/>
           </a:xfrm>
           <a:prstGeom prst="rect">
             <a:avLst/>
@@ -16465,8 +17569,8 @@
         </p:nvSpPr>
         <p:spPr>
           <a:xfrm>
-            <a:off x="7589520" y="1060704"/>
-            <a:ext cx="1682496" cy="905256"/>
+            <a:off x="7543800" y="1060704"/>
+            <a:ext cx="1819656" cy="694944"/>
           </a:xfrm>
           <a:prstGeom prst="rect">
             <a:avLst/>
@@ -16506,8 +17610,8 @@
         </p:nvSpPr>
         <p:spPr>
           <a:xfrm>
-            <a:off x="9345168" y="1024128"/>
-            <a:ext cx="2240280" cy="960120"/>
+            <a:off x="9436608" y="1024128"/>
+            <a:ext cx="2148840" cy="749808"/>
           </a:xfrm>
           <a:prstGeom prst="rect">
             <a:avLst/>
@@ -16552,8 +17656,8 @@
         </p:nvSpPr>
         <p:spPr>
           <a:xfrm>
-            <a:off x="9418320" y="1060704"/>
-            <a:ext cx="2093976" cy="905256"/>
+            <a:off x="9509760" y="1060704"/>
+            <a:ext cx="2002536" cy="694944"/>
           </a:xfrm>
           <a:prstGeom prst="rect">
             <a:avLst/>
@@ -16593,8 +17697,8 @@
         </p:nvSpPr>
         <p:spPr>
           <a:xfrm>
-            <a:off x="566928" y="1984248"/>
-            <a:ext cx="1554480" cy="960120"/>
+            <a:off x="566928" y="1773936"/>
+            <a:ext cx="1691640" cy="749808"/>
           </a:xfrm>
           <a:prstGeom prst="rect">
             <a:avLst/>
@@ -16639,8 +17743,8 @@
         </p:nvSpPr>
         <p:spPr>
           <a:xfrm>
-            <a:off x="640080" y="2020824"/>
-            <a:ext cx="1408176" cy="905256"/>
+            <a:off x="640080" y="1810512"/>
+            <a:ext cx="1545336" cy="694944"/>
           </a:xfrm>
           <a:prstGeom prst="rect">
             <a:avLst/>
@@ -16660,7 +17764,7 @@
               </a:spcAft>
             </a:pPr>
             <a:r>
-              <a:rPr sz="1200" b="1">
+              <a:rPr sz="1100" b="1">
                 <a:solidFill>
                   <a:srgbClr val="111111"/>
                 </a:solidFill>
@@ -16680,8 +17784,8 @@
         </p:nvSpPr>
         <p:spPr>
           <a:xfrm>
-            <a:off x="2121408" y="1984248"/>
-            <a:ext cx="2240280" cy="960120"/>
+            <a:off x="2258568" y="1773936"/>
+            <a:ext cx="2148840" cy="749808"/>
           </a:xfrm>
           <a:prstGeom prst="rect">
             <a:avLst/>
@@ -16726,8 +17830,8 @@
         </p:nvSpPr>
         <p:spPr>
           <a:xfrm>
-            <a:off x="2194560" y="2020824"/>
-            <a:ext cx="2093976" cy="905256"/>
+            <a:off x="2331720" y="1810512"/>
+            <a:ext cx="2002536" cy="694944"/>
           </a:xfrm>
           <a:prstGeom prst="rect">
             <a:avLst/>
@@ -16747,34 +17851,34 @@
               </a:spcAft>
             </a:pPr>
             <a:r>
-              <a:rPr sz="1200" b="0">
+              <a:rPr sz="1100" b="0">
                 <a:solidFill>
                   <a:srgbClr val="111111"/>
                 </a:solidFill>
                 <a:latin typeface="Calibri"/>
                 <a:ea typeface="Calibri"/>
               </a:rPr>
-              <a:t>Buyers live here.</a:t>
-            </a:r>
-          </a:p>
-          <a:p>
-            <a:pPr algn="l">
-              <a:spcBef>
-                <a:spcPts val="0"/>
-              </a:spcBef>
-              <a:spcAft>
-                <a:spcPts val="0"/>
-              </a:spcAft>
-            </a:pPr>
-            <a:r>
-              <a:rPr sz="1200" b="0">
+              <a:t>Open now</a:t>
+            </a:r>
+          </a:p>
+          <a:p>
+            <a:pPr algn="l">
+              <a:spcBef>
+                <a:spcPts val="0"/>
+              </a:spcBef>
+              <a:spcAft>
+                <a:spcPts val="0"/>
+              </a:spcAft>
+            </a:pPr>
+            <a:r>
+              <a:rPr sz="1100" b="0">
                 <a:solidFill>
                   <a:srgbClr val="111111"/>
                 </a:solidFill>
                 <a:latin typeface="Calibri"/>
                 <a:ea typeface="Calibri"/>
               </a:rPr>
-              <a:t>Primary acquisition.</a:t>
+              <a:t>Buyer home</a:t>
             </a:r>
           </a:p>
         </p:txBody>
@@ -16787,8 +17891,8 @@
         </p:nvSpPr>
         <p:spPr>
           <a:xfrm>
-            <a:off x="4361688" y="1984248"/>
-            <a:ext cx="3154680" cy="960120"/>
+            <a:off x="4407408" y="1773936"/>
+            <a:ext cx="3063240" cy="749808"/>
           </a:xfrm>
           <a:prstGeom prst="rect">
             <a:avLst/>
@@ -16833,8 +17937,8 @@
         </p:nvSpPr>
         <p:spPr>
           <a:xfrm>
-            <a:off x="4434840" y="2020824"/>
-            <a:ext cx="3008376" cy="905256"/>
+            <a:off x="4480560" y="1810512"/>
+            <a:ext cx="2916936" cy="694944"/>
           </a:xfrm>
           <a:prstGeom prst="rect">
             <a:avLst/>
@@ -16854,7 +17958,7 @@
               </a:spcAft>
             </a:pPr>
             <a:r>
-              <a:rPr sz="1200" b="0">
+              <a:rPr sz="1100" b="0">
                 <a:solidFill>
                   <a:srgbClr val="111111"/>
                 </a:solidFill>
@@ -16874,14 +17978,14 @@
               </a:spcAft>
             </a:pPr>
             <a:r>
-              <a:rPr sz="1200" b="0">
+              <a:rPr sz="1100" b="0">
                 <a:solidFill>
                   <a:srgbClr val="111111"/>
                 </a:solidFill>
                 <a:latin typeface="Calibri"/>
                 <a:ea typeface="Calibri"/>
               </a:rPr>
-              <a:t>show-meeting link.</a:t>
+              <a:t>show meeting. German master.</a:t>
             </a:r>
           </a:p>
         </p:txBody>
@@ -16894,8 +17998,8 @@
         </p:nvSpPr>
         <p:spPr>
           <a:xfrm>
-            <a:off x="7516368" y="1984248"/>
-            <a:ext cx="1828800" cy="960120"/>
+            <a:off x="7470648" y="1773936"/>
+            <a:ext cx="1965960" cy="749808"/>
           </a:xfrm>
           <a:prstGeom prst="rect">
             <a:avLst/>
@@ -16940,8 +18044,8 @@
         </p:nvSpPr>
         <p:spPr>
           <a:xfrm>
-            <a:off x="7589520" y="2020824"/>
-            <a:ext cx="1682496" cy="905256"/>
+            <a:off x="7543800" y="1810512"/>
+            <a:ext cx="1819656" cy="694944"/>
           </a:xfrm>
           <a:prstGeom prst="rect">
             <a:avLst/>
@@ -16961,34 +18065,34 @@
               </a:spcAft>
             </a:pPr>
             <a:r>
-              <a:rPr sz="1200" b="0">
+              <a:rPr sz="1100" b="0">
                 <a:solidFill>
                   <a:srgbClr val="111111"/>
                 </a:solidFill>
                 <a:latin typeface="Calibri"/>
                 <a:ea typeface="Calibri"/>
               </a:rPr>
-              <a:t>2 / week</a:t>
-            </a:r>
-          </a:p>
-          <a:p>
-            <a:pPr algn="l">
-              <a:spcBef>
-                <a:spcPts val="0"/>
-              </a:spcBef>
-              <a:spcAft>
-                <a:spcPts val="0"/>
-              </a:spcAft>
-            </a:pPr>
-            <a:r>
-              <a:rPr sz="1200" b="0">
+              <a:t>Every 2–3 days</a:t>
+            </a:r>
+          </a:p>
+          <a:p>
+            <a:pPr algn="l">
+              <a:spcBef>
+                <a:spcPts val="0"/>
+              </a:spcBef>
+              <a:spcAft>
+                <a:spcPts val="0"/>
+              </a:spcAft>
+            </a:pPr>
+            <a:r>
+              <a:rPr sz="1100" b="0">
                 <a:solidFill>
                   <a:srgbClr val="111111"/>
                 </a:solidFill>
                 <a:latin typeface="Calibri"/>
                 <a:ea typeface="Calibri"/>
               </a:rPr>
-              <a:t>4 in show week</a:t>
+              <a:t>Double in show week</a:t>
             </a:r>
           </a:p>
         </p:txBody>
@@ -17001,8 +18105,8 @@
         </p:nvSpPr>
         <p:spPr>
           <a:xfrm>
-            <a:off x="9345168" y="1984248"/>
-            <a:ext cx="2240280" cy="960120"/>
+            <a:off x="9436608" y="1773936"/>
+            <a:ext cx="2148840" cy="749808"/>
           </a:xfrm>
           <a:prstGeom prst="rect">
             <a:avLst/>
@@ -17047,8 +18151,8 @@
         </p:nvSpPr>
         <p:spPr>
           <a:xfrm>
-            <a:off x="9418320" y="2020824"/>
-            <a:ext cx="2093976" cy="905256"/>
+            <a:off x="9509760" y="1810512"/>
+            <a:ext cx="2002536" cy="694944"/>
           </a:xfrm>
           <a:prstGeom prst="rect">
             <a:avLst/>
@@ -17068,7 +18172,7 @@
               </a:spcAft>
             </a:pPr>
             <a:r>
-              <a:rPr sz="1200" b="0">
+              <a:rPr sz="1100" b="0">
                 <a:solidFill>
                   <a:srgbClr val="111111"/>
                 </a:solidFill>
@@ -17088,7 +18192,7 @@
               </a:spcAft>
             </a:pPr>
             <a:r>
-              <a:rPr sz="1200" b="0">
+              <a:rPr sz="1100" b="0">
                 <a:solidFill>
                   <a:srgbClr val="111111"/>
                 </a:solidFill>
@@ -17108,8 +18212,8 @@
         </p:nvSpPr>
         <p:spPr>
           <a:xfrm>
-            <a:off x="566928" y="2944368"/>
-            <a:ext cx="1554480" cy="960120"/>
+            <a:off x="566928" y="2523744"/>
+            <a:ext cx="1691640" cy="749808"/>
           </a:xfrm>
           <a:prstGeom prst="rect">
             <a:avLst/>
@@ -17154,8 +18258,8 @@
         </p:nvSpPr>
         <p:spPr>
           <a:xfrm>
-            <a:off x="640080" y="2980944"/>
-            <a:ext cx="1408176" cy="905256"/>
+            <a:off x="640080" y="2560320"/>
+            <a:ext cx="1545336" cy="694944"/>
           </a:xfrm>
           <a:prstGeom prst="rect">
             <a:avLst/>
@@ -17175,7 +18279,7 @@
               </a:spcAft>
             </a:pPr>
             <a:r>
-              <a:rPr sz="1200" b="1">
+              <a:rPr sz="1100" b="1">
                 <a:solidFill>
                   <a:srgbClr val="111111"/>
                 </a:solidFill>
@@ -17195,8 +18299,8 @@
         </p:nvSpPr>
         <p:spPr>
           <a:xfrm>
-            <a:off x="2121408" y="2944368"/>
-            <a:ext cx="2240280" cy="960120"/>
+            <a:off x="2258568" y="2523744"/>
+            <a:ext cx="2148840" cy="749808"/>
           </a:xfrm>
           <a:prstGeom prst="rect">
             <a:avLst/>
@@ -17241,8 +18345,8 @@
         </p:nvSpPr>
         <p:spPr>
           <a:xfrm>
-            <a:off x="2194560" y="2980944"/>
-            <a:ext cx="2093976" cy="905256"/>
+            <a:off x="2331720" y="2560320"/>
+            <a:ext cx="2002536" cy="694944"/>
           </a:xfrm>
           <a:prstGeom prst="rect">
             <a:avLst/>
@@ -17262,34 +18366,34 @@
               </a:spcAft>
             </a:pPr>
             <a:r>
-              <a:rPr sz="1200" b="0">
+              <a:rPr sz="1100" b="0">
                 <a:solidFill>
                   <a:srgbClr val="111111"/>
                 </a:solidFill>
                 <a:latin typeface="Calibri"/>
                 <a:ea typeface="Calibri"/>
               </a:rPr>
-              <a:t>Picture is proof.</a:t>
-            </a:r>
-          </a:p>
-          <a:p>
-            <a:pPr algn="l">
-              <a:spcBef>
-                <a:spcPts val="0"/>
-              </a:spcBef>
-              <a:spcAft>
-                <a:spcPts val="0"/>
-              </a:spcAft>
-            </a:pPr>
-            <a:r>
-              <a:rPr sz="1200" b="0">
+              <a:t>Open now</a:t>
+            </a:r>
+          </a:p>
+          <a:p>
+            <a:pPr algn="l">
+              <a:spcBef>
+                <a:spcPts val="0"/>
+              </a:spcBef>
+              <a:spcAft>
+                <a:spcPts val="0"/>
+              </a:spcAft>
+            </a:pPr>
+            <a:r>
+              <a:rPr sz="1100" b="0">
                 <a:solidFill>
                   <a:srgbClr val="111111"/>
                 </a:solidFill>
                 <a:latin typeface="Calibri"/>
                 <a:ea typeface="Calibri"/>
               </a:rPr>
-              <a:t>Integrators forward it.</a:t>
+              <a:t>Picture is proof</a:t>
             </a:r>
           </a:p>
         </p:txBody>
@@ -17302,8 +18406,8 @@
         </p:nvSpPr>
         <p:spPr>
           <a:xfrm>
-            <a:off x="4361688" y="2944368"/>
-            <a:ext cx="3154680" cy="960120"/>
+            <a:off x="4407408" y="2523744"/>
+            <a:ext cx="3063240" cy="749808"/>
           </a:xfrm>
           <a:prstGeom prst="rect">
             <a:avLst/>
@@ -17348,8 +18452,8 @@
         </p:nvSpPr>
         <p:spPr>
           <a:xfrm>
-            <a:off x="4434840" y="2980944"/>
-            <a:ext cx="3008376" cy="905256"/>
+            <a:off x="4480560" y="2560320"/>
+            <a:ext cx="2916936" cy="694944"/>
           </a:xfrm>
           <a:prstGeom prst="rect">
             <a:avLst/>
@@ -17369,34 +18473,34 @@
               </a:spcAft>
             </a:pPr>
             <a:r>
-              <a:rPr sz="1200" b="0">
+              <a:rPr sz="1100" b="0">
                 <a:solidFill>
                   <a:srgbClr val="111111"/>
                 </a:solidFill>
                 <a:latin typeface="Calibri"/>
                 <a:ea typeface="Calibri"/>
               </a:rPr>
-              <a:t>15s control room, LED close-up,</a:t>
-            </a:r>
-          </a:p>
-          <a:p>
-            <a:pPr algn="l">
-              <a:spcBef>
-                <a:spcPts val="0"/>
-              </a:spcBef>
-              <a:spcAft>
-                <a:spcPts val="0"/>
-              </a:spcAft>
-            </a:pPr>
-            <a:r>
-              <a:rPr sz="1200" b="0">
+              <a:t>Reels: control room, LED, match night.</a:t>
+            </a:r>
+          </a:p>
+          <a:p>
+            <a:pPr algn="l">
+              <a:spcBef>
+                <a:spcPts val="0"/>
+              </a:spcBef>
+              <a:spcAft>
+                <a:spcPts val="0"/>
+              </a:spcAft>
+            </a:pPr>
+            <a:r>
+              <a:rPr sz="1100" b="0">
                 <a:solidFill>
                   <a:srgbClr val="111111"/>
                 </a:solidFill>
                 <a:latin typeface="Calibri"/>
                 <a:ea typeface="Calibri"/>
               </a:rPr>
-              <a:t>match night. No spec sheets.</a:t>
+              <a:t>No spec sheets.</a:t>
             </a:r>
           </a:p>
         </p:txBody>
@@ -17409,8 +18513,8 @@
         </p:nvSpPr>
         <p:spPr>
           <a:xfrm>
-            <a:off x="7516368" y="2944368"/>
-            <a:ext cx="1828800" cy="960120"/>
+            <a:off x="7470648" y="2523744"/>
+            <a:ext cx="1965960" cy="749808"/>
           </a:xfrm>
           <a:prstGeom prst="rect">
             <a:avLst/>
@@ -17455,8 +18559,8 @@
         </p:nvSpPr>
         <p:spPr>
           <a:xfrm>
-            <a:off x="7589520" y="2980944"/>
-            <a:ext cx="1682496" cy="905256"/>
+            <a:off x="7543800" y="2560320"/>
+            <a:ext cx="1819656" cy="694944"/>
           </a:xfrm>
           <a:prstGeom prst="rect">
             <a:avLst/>
@@ -17476,14 +18580,14 @@
               </a:spcAft>
             </a:pPr>
             <a:r>
-              <a:rPr sz="1200" b="0">
+              <a:rPr sz="1100" b="0">
                 <a:solidFill>
                   <a:srgbClr val="111111"/>
                 </a:solidFill>
                 <a:latin typeface="Calibri"/>
                 <a:ea typeface="Calibri"/>
               </a:rPr>
-              <a:t>3 / week</a:t>
+              <a:t>Every 2–3 days</a:t>
             </a:r>
           </a:p>
         </p:txBody>
@@ -17496,8 +18600,8 @@
         </p:nvSpPr>
         <p:spPr>
           <a:xfrm>
-            <a:off x="9345168" y="2944368"/>
-            <a:ext cx="2240280" cy="960120"/>
+            <a:off x="9436608" y="2523744"/>
+            <a:ext cx="2148840" cy="749808"/>
           </a:xfrm>
           <a:prstGeom prst="rect">
             <a:avLst/>
@@ -17542,8 +18646,8 @@
         </p:nvSpPr>
         <p:spPr>
           <a:xfrm>
-            <a:off x="9418320" y="2980944"/>
-            <a:ext cx="2093976" cy="905256"/>
+            <a:off x="9509760" y="2560320"/>
+            <a:ext cx="2002536" cy="694944"/>
           </a:xfrm>
           <a:prstGeom prst="rect">
             <a:avLst/>
@@ -17563,7 +18667,7 @@
               </a:spcAft>
             </a:pPr>
             <a:r>
-              <a:rPr sz="1200" b="0">
+              <a:rPr sz="1100" b="0">
                 <a:solidFill>
                   <a:srgbClr val="111111"/>
                 </a:solidFill>
@@ -17583,14 +18687,14 @@
               </a:spcAft>
             </a:pPr>
             <a:r>
-              <a:rPr sz="1200" b="0">
+              <a:rPr sz="1100" b="0">
                 <a:solidFill>
                   <a:srgbClr val="111111"/>
                 </a:solidFill>
                 <a:latin typeface="Calibri"/>
                 <a:ea typeface="Calibri"/>
               </a:rPr>
-              <a:t>footage from site</a:t>
+              <a:t>Site footage</a:t>
             </a:r>
           </a:p>
         </p:txBody>
@@ -17603,8 +18707,8 @@
         </p:nvSpPr>
         <p:spPr>
           <a:xfrm>
-            <a:off x="566928" y="3904488"/>
-            <a:ext cx="1554480" cy="960120"/>
+            <a:off x="566928" y="3273552"/>
+            <a:ext cx="1691640" cy="749808"/>
           </a:xfrm>
           <a:prstGeom prst="rect">
             <a:avLst/>
@@ -17649,8 +18753,8 @@
         </p:nvSpPr>
         <p:spPr>
           <a:xfrm>
-            <a:off x="640080" y="3941064"/>
-            <a:ext cx="1408176" cy="905256"/>
+            <a:off x="640080" y="3310128"/>
+            <a:ext cx="1545336" cy="694944"/>
           </a:xfrm>
           <a:prstGeom prst="rect">
             <a:avLst/>
@@ -17670,14 +18774,14 @@
               </a:spcAft>
             </a:pPr>
             <a:r>
-              <a:rPr sz="1200" b="1">
+              <a:rPr sz="1100" b="1">
                 <a:solidFill>
                   <a:srgbClr val="111111"/>
                 </a:solidFill>
                 <a:latin typeface="Calibri"/>
                 <a:ea typeface="Calibri"/>
               </a:rPr>
-              <a:t>YouTube</a:t>
+              <a:t>X / Twitter</a:t>
             </a:r>
           </a:p>
         </p:txBody>
@@ -17690,8 +18794,8 @@
         </p:nvSpPr>
         <p:spPr>
           <a:xfrm>
-            <a:off x="2121408" y="3904488"/>
-            <a:ext cx="2240280" cy="960120"/>
+            <a:off x="2258568" y="3273552"/>
+            <a:ext cx="2148840" cy="749808"/>
           </a:xfrm>
           <a:prstGeom prst="rect">
             <a:avLst/>
@@ -17736,8 +18840,8 @@
         </p:nvSpPr>
         <p:spPr>
           <a:xfrm>
-            <a:off x="2194560" y="3941064"/>
-            <a:ext cx="2093976" cy="905256"/>
+            <a:off x="2331720" y="3310128"/>
+            <a:ext cx="2002536" cy="694944"/>
           </a:xfrm>
           <a:prstGeom prst="rect">
             <a:avLst/>
@@ -17757,34 +18861,34 @@
               </a:spcAft>
             </a:pPr>
             <a:r>
-              <a:rPr sz="1200" b="0">
+              <a:rPr sz="1100" b="0">
                 <a:solidFill>
                   <a:srgbClr val="111111"/>
                 </a:solidFill>
                 <a:latin typeface="Calibri"/>
                 <a:ea typeface="Calibri"/>
               </a:rPr>
-              <a:t>Searchable.</a:t>
-            </a:r>
-          </a:p>
-          <a:p>
-            <a:pPr algn="l">
-              <a:spcBef>
-                <a:spcPts val="0"/>
-              </a:spcBef>
-              <a:spcAft>
-                <a:spcPts val="0"/>
-              </a:spcAft>
-            </a:pPr>
-            <a:r>
-              <a:rPr sz="1200" b="0">
+              <a:t>After the two work</a:t>
+            </a:r>
+          </a:p>
+          <a:p>
+            <a:pPr algn="l">
+              <a:spcBef>
+                <a:spcPts val="0"/>
+              </a:spcBef>
+              <a:spcAft>
+                <a:spcPts val="0"/>
+              </a:spcAft>
+            </a:pPr>
+            <a:r>
+              <a:rPr sz="1100" b="0">
                 <a:solidFill>
                   <a:srgbClr val="111111"/>
                 </a:solidFill>
                 <a:latin typeface="Calibri"/>
                 <a:ea typeface="Calibri"/>
               </a:rPr>
-              <a:t>Embed on site + mail.</a:t>
+              <a:t>Short news</a:t>
             </a:r>
           </a:p>
         </p:txBody>
@@ -17797,8 +18901,8 @@
         </p:nvSpPr>
         <p:spPr>
           <a:xfrm>
-            <a:off x="4361688" y="3904488"/>
-            <a:ext cx="3154680" cy="960120"/>
+            <a:off x="4407408" y="3273552"/>
+            <a:ext cx="3063240" cy="749808"/>
           </a:xfrm>
           <a:prstGeom prst="rect">
             <a:avLst/>
@@ -17843,8 +18947,8 @@
         </p:nvSpPr>
         <p:spPr>
           <a:xfrm>
-            <a:off x="4434840" y="3941064"/>
-            <a:ext cx="3008376" cy="905256"/>
+            <a:off x="4480560" y="3310128"/>
+            <a:ext cx="2916936" cy="694944"/>
           </a:xfrm>
           <a:prstGeom prst="rect">
             <a:avLst/>
@@ -17864,34 +18968,34 @@
               </a:spcAft>
             </a:pPr>
             <a:r>
-              <a:rPr sz="1200" b="0">
+              <a:rPr sz="1100" b="0">
                 <a:solidFill>
                   <a:srgbClr val="111111"/>
                 </a:solidFill>
                 <a:latin typeface="Calibri"/>
                 <a:ea typeface="Calibri"/>
               </a:rPr>
-              <a:t>60s system film + 30s SCORE</a:t>
-            </a:r>
-          </a:p>
-          <a:p>
-            <a:pPr algn="l">
-              <a:spcBef>
-                <a:spcPts val="0"/>
-              </a:spcBef>
-              <a:spcAft>
-                <a:spcPts val="0"/>
-              </a:spcAft>
-            </a:pPr>
-            <a:r>
-              <a:rPr sz="1200" b="0">
+              <a:t>One line, one still, one link.</a:t>
+            </a:r>
+          </a:p>
+          <a:p>
+            <a:pPr algn="l">
+              <a:spcBef>
+                <a:spcPts val="0"/>
+              </a:spcBef>
+              <a:spcAft>
+                <a:spcPts val="0"/>
+              </a:spcAft>
+            </a:pPr>
+            <a:r>
+              <a:rPr sz="1100" b="0">
                 <a:solidFill>
                   <a:srgbClr val="111111"/>
                 </a:solidFill>
                 <a:latin typeface="Calibri"/>
                 <a:ea typeface="Calibri"/>
               </a:rPr>
-              <a:t>and 30s LED.</a:t>
+              <a:t>Like Stramatel: install + match night.</a:t>
             </a:r>
           </a:p>
         </p:txBody>
@@ -17904,8 +19008,8 @@
         </p:nvSpPr>
         <p:spPr>
           <a:xfrm>
-            <a:off x="7516368" y="3904488"/>
-            <a:ext cx="1828800" cy="960120"/>
+            <a:off x="7470648" y="3273552"/>
+            <a:ext cx="1965960" cy="749808"/>
           </a:xfrm>
           <a:prstGeom prst="rect">
             <a:avLst/>
@@ -17950,8 +19054,8 @@
         </p:nvSpPr>
         <p:spPr>
           <a:xfrm>
-            <a:off x="7589520" y="3941064"/>
-            <a:ext cx="1682496" cy="905256"/>
+            <a:off x="7543800" y="3310128"/>
+            <a:ext cx="1819656" cy="694944"/>
           </a:xfrm>
           <a:prstGeom prst="rect">
             <a:avLst/>
@@ -17971,14 +19075,14 @@
               </a:spcAft>
             </a:pPr>
             <a:r>
-              <a:rPr sz="1200" b="0">
+              <a:rPr sz="1100" b="0">
                 <a:solidFill>
                   <a:srgbClr val="111111"/>
                 </a:solidFill>
                 <a:latin typeface="Calibri"/>
                 <a:ea typeface="Calibri"/>
               </a:rPr>
-              <a:t>2 / month</a:t>
+              <a:t>When there is news</a:t>
             </a:r>
           </a:p>
         </p:txBody>
@@ -17991,8 +19095,8 @@
         </p:nvSpPr>
         <p:spPr>
           <a:xfrm>
-            <a:off x="9345168" y="3904488"/>
-            <a:ext cx="2240280" cy="960120"/>
+            <a:off x="9436608" y="3273552"/>
+            <a:ext cx="2148840" cy="749808"/>
           </a:xfrm>
           <a:prstGeom prst="rect">
             <a:avLst/>
@@ -18037,8 +19141,8 @@
         </p:nvSpPr>
         <p:spPr>
           <a:xfrm>
-            <a:off x="9418320" y="3941064"/>
-            <a:ext cx="2093976" cy="905256"/>
+            <a:off x="9509760" y="3310128"/>
+            <a:ext cx="2002536" cy="694944"/>
           </a:xfrm>
           <a:prstGeom prst="rect">
             <a:avLst/>
@@ -18058,34 +19162,14 @@
               </a:spcAft>
             </a:pPr>
             <a:r>
-              <a:rPr sz="1200" b="0">
+              <a:rPr sz="1100" b="0">
                 <a:solidFill>
                   <a:srgbClr val="111111"/>
                 </a:solidFill>
                 <a:latin typeface="Calibri"/>
                 <a:ea typeface="Calibri"/>
               </a:rPr>
-              <a:t>Jürg directs</a:t>
-            </a:r>
-          </a:p>
-          <a:p>
-            <a:pPr algn="l">
-              <a:spcBef>
-                <a:spcPts val="0"/>
-              </a:spcBef>
-              <a:spcAft>
-                <a:spcPts val="0"/>
-              </a:spcAft>
-            </a:pPr>
-            <a:r>
-              <a:rPr sz="1200" b="0">
-                <a:solidFill>
-                  <a:srgbClr val="111111"/>
-                </a:solidFill>
-                <a:latin typeface="Calibri"/>
-                <a:ea typeface="Calibri"/>
-              </a:rPr>
-              <a:t>Donglin assists</a:t>
+              <a:t>Peter</a:t>
             </a:r>
           </a:p>
         </p:txBody>
@@ -18098,7 +19182,502 @@
         </p:nvSpPr>
         <p:spPr>
           <a:xfrm>
-            <a:off x="566928" y="5010912"/>
+            <a:off x="566928" y="4023360"/>
+            <a:ext cx="1691640" cy="749808"/>
+          </a:xfrm>
+          <a:prstGeom prst="rect">
+            <a:avLst/>
+          </a:prstGeom>
+          <a:solidFill>
+            <a:srgbClr val="FFFFFF"/>
+          </a:solidFill>
+          <a:ln w="9525">
+            <a:solidFill>
+              <a:srgbClr val="E6E6E6"/>
+            </a:solidFill>
+          </a:ln>
+          <a:effectLst/>
+        </p:spPr>
+        <p:style>
+          <a:lnRef idx="1">
+            <a:schemeClr val="accent1"/>
+          </a:lnRef>
+          <a:fillRef idx="3">
+            <a:schemeClr val="accent1"/>
+          </a:fillRef>
+          <a:effectRef idx="2">
+            <a:schemeClr val="accent1"/>
+          </a:effectRef>
+          <a:fontRef idx="minor">
+            <a:schemeClr val="lt1"/>
+          </a:fontRef>
+        </p:style>
+        <p:txBody>
+          <a:bodyPr rtlCol="0" anchor="ctr"/>
+          <a:lstStyle/>
+          <a:p>
+            <a:pPr algn="ctr"/>
+          </a:p>
+        </p:txBody>
+      </p:sp>
+      <p:sp>
+        <p:nvSpPr>
+          <p:cNvPr id="47" name="TextBox 46"/>
+          <p:cNvSpPr txBox="1"/>
+          <p:nvPr/>
+        </p:nvSpPr>
+        <p:spPr>
+          <a:xfrm>
+            <a:off x="640080" y="4059936"/>
+            <a:ext cx="1545336" cy="694944"/>
+          </a:xfrm>
+          <a:prstGeom prst="rect">
+            <a:avLst/>
+          </a:prstGeom>
+          <a:noFill/>
+        </p:spPr>
+        <p:txBody>
+          <a:bodyPr wrap="square" anchor="ctr"/>
+          <a:lstStyle/>
+          <a:p>
+            <a:pPr algn="l">
+              <a:spcBef>
+                <a:spcPts val="0"/>
+              </a:spcBef>
+              <a:spcAft>
+                <a:spcPts val="0"/>
+              </a:spcAft>
+            </a:pPr>
+            <a:r>
+              <a:rPr sz="1100" b="1">
+                <a:solidFill>
+                  <a:srgbClr val="111111"/>
+                </a:solidFill>
+                <a:latin typeface="Calibri"/>
+                <a:ea typeface="Calibri"/>
+              </a:rPr>
+              <a:t>YouTube</a:t>
+            </a:r>
+          </a:p>
+        </p:txBody>
+      </p:sp>
+      <p:sp>
+        <p:nvSpPr>
+          <p:cNvPr id="48" name="Rectangle 47"/>
+          <p:cNvSpPr/>
+          <p:nvPr/>
+        </p:nvSpPr>
+        <p:spPr>
+          <a:xfrm>
+            <a:off x="2258568" y="4023360"/>
+            <a:ext cx="2148840" cy="749808"/>
+          </a:xfrm>
+          <a:prstGeom prst="rect">
+            <a:avLst/>
+          </a:prstGeom>
+          <a:solidFill>
+            <a:srgbClr val="FFFFFF"/>
+          </a:solidFill>
+          <a:ln w="9525">
+            <a:solidFill>
+              <a:srgbClr val="E6E6E6"/>
+            </a:solidFill>
+          </a:ln>
+          <a:effectLst/>
+        </p:spPr>
+        <p:style>
+          <a:lnRef idx="1">
+            <a:schemeClr val="accent1"/>
+          </a:lnRef>
+          <a:fillRef idx="3">
+            <a:schemeClr val="accent1"/>
+          </a:fillRef>
+          <a:effectRef idx="2">
+            <a:schemeClr val="accent1"/>
+          </a:effectRef>
+          <a:fontRef idx="minor">
+            <a:schemeClr val="lt1"/>
+          </a:fontRef>
+        </p:style>
+        <p:txBody>
+          <a:bodyPr rtlCol="0" anchor="ctr"/>
+          <a:lstStyle/>
+          <a:p>
+            <a:pPr algn="ctr"/>
+          </a:p>
+        </p:txBody>
+      </p:sp>
+      <p:sp>
+        <p:nvSpPr>
+          <p:cNvPr id="49" name="TextBox 48"/>
+          <p:cNvSpPr txBox="1"/>
+          <p:nvPr/>
+        </p:nvSpPr>
+        <p:spPr>
+          <a:xfrm>
+            <a:off x="2331720" y="4059936"/>
+            <a:ext cx="2002536" cy="694944"/>
+          </a:xfrm>
+          <a:prstGeom prst="rect">
+            <a:avLst/>
+          </a:prstGeom>
+          <a:noFill/>
+        </p:spPr>
+        <p:txBody>
+          <a:bodyPr wrap="square" anchor="ctr"/>
+          <a:lstStyle/>
+          <a:p>
+            <a:pPr algn="l">
+              <a:spcBef>
+                <a:spcPts val="0"/>
+              </a:spcBef>
+              <a:spcAft>
+                <a:spcPts val="0"/>
+              </a:spcAft>
+            </a:pPr>
+            <a:r>
+              <a:rPr sz="1100" b="0">
+                <a:solidFill>
+                  <a:srgbClr val="111111"/>
+                </a:solidFill>
+                <a:latin typeface="Calibri"/>
+                <a:ea typeface="Calibri"/>
+              </a:rPr>
+              <a:t>After the two work</a:t>
+            </a:r>
+          </a:p>
+          <a:p>
+            <a:pPr algn="l">
+              <a:spcBef>
+                <a:spcPts val="0"/>
+              </a:spcBef>
+              <a:spcAft>
+                <a:spcPts val="0"/>
+              </a:spcAft>
+            </a:pPr>
+            <a:r>
+              <a:rPr sz="1100" b="0">
+                <a:solidFill>
+                  <a:srgbClr val="111111"/>
+                </a:solidFill>
+                <a:latin typeface="Calibri"/>
+                <a:ea typeface="Calibri"/>
+              </a:rPr>
+              <a:t>Search</a:t>
+            </a:r>
+          </a:p>
+        </p:txBody>
+      </p:sp>
+      <p:sp>
+        <p:nvSpPr>
+          <p:cNvPr id="50" name="Rectangle 49"/>
+          <p:cNvSpPr/>
+          <p:nvPr/>
+        </p:nvSpPr>
+        <p:spPr>
+          <a:xfrm>
+            <a:off x="4407408" y="4023360"/>
+            <a:ext cx="3063240" cy="749808"/>
+          </a:xfrm>
+          <a:prstGeom prst="rect">
+            <a:avLst/>
+          </a:prstGeom>
+          <a:solidFill>
+            <a:srgbClr val="FFFFFF"/>
+          </a:solidFill>
+          <a:ln w="9525">
+            <a:solidFill>
+              <a:srgbClr val="E6E6E6"/>
+            </a:solidFill>
+          </a:ln>
+          <a:effectLst/>
+        </p:spPr>
+        <p:style>
+          <a:lnRef idx="1">
+            <a:schemeClr val="accent1"/>
+          </a:lnRef>
+          <a:fillRef idx="3">
+            <a:schemeClr val="accent1"/>
+          </a:fillRef>
+          <a:effectRef idx="2">
+            <a:schemeClr val="accent1"/>
+          </a:effectRef>
+          <a:fontRef idx="minor">
+            <a:schemeClr val="lt1"/>
+          </a:fontRef>
+        </p:style>
+        <p:txBody>
+          <a:bodyPr rtlCol="0" anchor="ctr"/>
+          <a:lstStyle/>
+          <a:p>
+            <a:pPr algn="ctr"/>
+          </a:p>
+        </p:txBody>
+      </p:sp>
+      <p:sp>
+        <p:nvSpPr>
+          <p:cNvPr id="51" name="TextBox 50"/>
+          <p:cNvSpPr txBox="1"/>
+          <p:nvPr/>
+        </p:nvSpPr>
+        <p:spPr>
+          <a:xfrm>
+            <a:off x="4480560" y="4059936"/>
+            <a:ext cx="2916936" cy="694944"/>
+          </a:xfrm>
+          <a:prstGeom prst="rect">
+            <a:avLst/>
+          </a:prstGeom>
+          <a:noFill/>
+        </p:spPr>
+        <p:txBody>
+          <a:bodyPr wrap="square" anchor="ctr"/>
+          <a:lstStyle/>
+          <a:p>
+            <a:pPr algn="l">
+              <a:spcBef>
+                <a:spcPts val="0"/>
+              </a:spcBef>
+              <a:spcAft>
+                <a:spcPts val="0"/>
+              </a:spcAft>
+            </a:pPr>
+            <a:r>
+              <a:rPr sz="1100" b="0">
+                <a:solidFill>
+                  <a:srgbClr val="111111"/>
+                </a:solidFill>
+                <a:latin typeface="Calibri"/>
+                <a:ea typeface="Calibri"/>
+              </a:rPr>
+              <a:t>7s SCORE + 60s system</a:t>
+            </a:r>
+          </a:p>
+          <a:p>
+            <a:pPr algn="l">
+              <a:spcBef>
+                <a:spcPts val="0"/>
+              </a:spcBef>
+              <a:spcAft>
+                <a:spcPts val="0"/>
+              </a:spcAft>
+            </a:pPr>
+            <a:r>
+              <a:rPr sz="1100" b="0">
+                <a:solidFill>
+                  <a:srgbClr val="111111"/>
+                </a:solidFill>
+                <a:latin typeface="Calibri"/>
+                <a:ea typeface="Calibri"/>
+              </a:rPr>
+              <a:t>+ longer how-to.</a:t>
+            </a:r>
+          </a:p>
+        </p:txBody>
+      </p:sp>
+      <p:sp>
+        <p:nvSpPr>
+          <p:cNvPr id="52" name="Rectangle 51"/>
+          <p:cNvSpPr/>
+          <p:nvPr/>
+        </p:nvSpPr>
+        <p:spPr>
+          <a:xfrm>
+            <a:off x="7470648" y="4023360"/>
+            <a:ext cx="1965960" cy="749808"/>
+          </a:xfrm>
+          <a:prstGeom prst="rect">
+            <a:avLst/>
+          </a:prstGeom>
+          <a:solidFill>
+            <a:srgbClr val="FFFFFF"/>
+          </a:solidFill>
+          <a:ln w="9525">
+            <a:solidFill>
+              <a:srgbClr val="E6E6E6"/>
+            </a:solidFill>
+          </a:ln>
+          <a:effectLst/>
+        </p:spPr>
+        <p:style>
+          <a:lnRef idx="1">
+            <a:schemeClr val="accent1"/>
+          </a:lnRef>
+          <a:fillRef idx="3">
+            <a:schemeClr val="accent1"/>
+          </a:fillRef>
+          <a:effectRef idx="2">
+            <a:schemeClr val="accent1"/>
+          </a:effectRef>
+          <a:fontRef idx="minor">
+            <a:schemeClr val="lt1"/>
+          </a:fontRef>
+        </p:style>
+        <p:txBody>
+          <a:bodyPr rtlCol="0" anchor="ctr"/>
+          <a:lstStyle/>
+          <a:p>
+            <a:pPr algn="ctr"/>
+          </a:p>
+        </p:txBody>
+      </p:sp>
+      <p:sp>
+        <p:nvSpPr>
+          <p:cNvPr id="53" name="TextBox 52"/>
+          <p:cNvSpPr txBox="1"/>
+          <p:nvPr/>
+        </p:nvSpPr>
+        <p:spPr>
+          <a:xfrm>
+            <a:off x="7543800" y="4059936"/>
+            <a:ext cx="1819656" cy="694944"/>
+          </a:xfrm>
+          <a:prstGeom prst="rect">
+            <a:avLst/>
+          </a:prstGeom>
+          <a:noFill/>
+        </p:spPr>
+        <p:txBody>
+          <a:bodyPr wrap="square" anchor="ctr"/>
+          <a:lstStyle/>
+          <a:p>
+            <a:pPr algn="l">
+              <a:spcBef>
+                <a:spcPts val="0"/>
+              </a:spcBef>
+              <a:spcAft>
+                <a:spcPts val="0"/>
+              </a:spcAft>
+            </a:pPr>
+            <a:r>
+              <a:rPr sz="1100" b="0">
+                <a:solidFill>
+                  <a:srgbClr val="111111"/>
+                </a:solidFill>
+                <a:latin typeface="Calibri"/>
+                <a:ea typeface="Calibri"/>
+              </a:rPr>
+              <a:t>2 / month</a:t>
+            </a:r>
+          </a:p>
+        </p:txBody>
+      </p:sp>
+      <p:sp>
+        <p:nvSpPr>
+          <p:cNvPr id="54" name="Rectangle 53"/>
+          <p:cNvSpPr/>
+          <p:nvPr/>
+        </p:nvSpPr>
+        <p:spPr>
+          <a:xfrm>
+            <a:off x="9436608" y="4023360"/>
+            <a:ext cx="2148840" cy="749808"/>
+          </a:xfrm>
+          <a:prstGeom prst="rect">
+            <a:avLst/>
+          </a:prstGeom>
+          <a:solidFill>
+            <a:srgbClr val="FFFFFF"/>
+          </a:solidFill>
+          <a:ln w="9525">
+            <a:solidFill>
+              <a:srgbClr val="E6E6E6"/>
+            </a:solidFill>
+          </a:ln>
+          <a:effectLst/>
+        </p:spPr>
+        <p:style>
+          <a:lnRef idx="1">
+            <a:schemeClr val="accent1"/>
+          </a:lnRef>
+          <a:fillRef idx="3">
+            <a:schemeClr val="accent1"/>
+          </a:fillRef>
+          <a:effectRef idx="2">
+            <a:schemeClr val="accent1"/>
+          </a:effectRef>
+          <a:fontRef idx="minor">
+            <a:schemeClr val="lt1"/>
+          </a:fontRef>
+        </p:style>
+        <p:txBody>
+          <a:bodyPr rtlCol="0" anchor="ctr"/>
+          <a:lstStyle/>
+          <a:p>
+            <a:pPr algn="ctr"/>
+          </a:p>
+        </p:txBody>
+      </p:sp>
+      <p:sp>
+        <p:nvSpPr>
+          <p:cNvPr id="55" name="TextBox 54"/>
+          <p:cNvSpPr txBox="1"/>
+          <p:nvPr/>
+        </p:nvSpPr>
+        <p:spPr>
+          <a:xfrm>
+            <a:off x="9509760" y="4059936"/>
+            <a:ext cx="2002536" cy="694944"/>
+          </a:xfrm>
+          <a:prstGeom prst="rect">
+            <a:avLst/>
+          </a:prstGeom>
+          <a:noFill/>
+        </p:spPr>
+        <p:txBody>
+          <a:bodyPr wrap="square" anchor="ctr"/>
+          <a:lstStyle/>
+          <a:p>
+            <a:pPr algn="l">
+              <a:spcBef>
+                <a:spcPts val="0"/>
+              </a:spcBef>
+              <a:spcAft>
+                <a:spcPts val="0"/>
+              </a:spcAft>
+            </a:pPr>
+            <a:r>
+              <a:rPr sz="1100" b="0">
+                <a:solidFill>
+                  <a:srgbClr val="111111"/>
+                </a:solidFill>
+                <a:latin typeface="Calibri"/>
+                <a:ea typeface="Calibri"/>
+              </a:rPr>
+              <a:t>Jürg</a:t>
+            </a:r>
+          </a:p>
+          <a:p>
+            <a:pPr algn="l">
+              <a:spcBef>
+                <a:spcPts val="0"/>
+              </a:spcBef>
+              <a:spcAft>
+                <a:spcPts val="0"/>
+              </a:spcAft>
+            </a:pPr>
+            <a:r>
+              <a:rPr sz="1100" b="0">
+                <a:solidFill>
+                  <a:srgbClr val="111111"/>
+                </a:solidFill>
+                <a:latin typeface="Calibri"/>
+                <a:ea typeface="Calibri"/>
+              </a:rPr>
+              <a:t>Donglin</a:t>
+            </a:r>
+          </a:p>
+        </p:txBody>
+      </p:sp>
+      <p:sp>
+        <p:nvSpPr>
+          <p:cNvPr id="56" name="Rectangle 55"/>
+          <p:cNvSpPr/>
+          <p:nvPr/>
+        </p:nvSpPr>
+        <p:spPr>
+          <a:xfrm>
+            <a:off x="566928" y="4919472"/>
             <a:ext cx="11045952" cy="658368"/>
           </a:xfrm>
           <a:prstGeom prst="rect">
@@ -18136,13 +19715,13 @@
       </p:sp>
       <p:sp>
         <p:nvSpPr>
-          <p:cNvPr id="47" name="TextBox 46"/>
-          <p:cNvSpPr txBox="1"/>
-          <p:nvPr/>
-        </p:nvSpPr>
-        <p:spPr>
-          <a:xfrm>
-            <a:off x="749808" y="5102352"/>
+          <p:cNvPr id="57" name="TextBox 56"/>
+          <p:cNvSpPr txBox="1"/>
+          <p:nvPr/>
+        </p:nvSpPr>
+        <p:spPr>
+          <a:xfrm>
+            <a:off x="749808" y="5010912"/>
             <a:ext cx="10698480" cy="475488"/>
           </a:xfrm>
           <a:prstGeom prst="rect">
@@ -18170,21 +19749,21 @@
                 <a:latin typeface="Calibri"/>
                 <a:ea typeface="Calibri"/>
               </a:rPr>
-              <a:t>Three films, reused everywhere: A 60s system (due 20 Oct, extend the handball intro) · B 30s SCORE · C 30s LED. Same pack for site, mail, shows, dealers.</a:t>
-            </a:r>
-          </a:p>
-        </p:txBody>
-      </p:sp>
-      <p:sp>
-        <p:nvSpPr>
-          <p:cNvPr id="48" name="TextBox 47"/>
-          <p:cNvSpPr txBox="1"/>
-          <p:nvPr/>
-        </p:nvSpPr>
-        <p:spPr>
-          <a:xfrm>
-            <a:off x="566928" y="5779008"/>
-            <a:ext cx="11064240" cy="530352"/>
+              <a:t>Register on a new Swiss mobile number. Accounts stay off personal SIMs. Newsjack match nights and show weeks, not consumer gadget launches.</a:t>
+            </a:r>
+          </a:p>
+        </p:txBody>
+      </p:sp>
+      <p:sp>
+        <p:nvSpPr>
+          <p:cNvPr id="58" name="TextBox 57"/>
+          <p:cNvSpPr txBox="1"/>
+          <p:nvPr/>
+        </p:nvSpPr>
+        <p:spPr>
+          <a:xfrm>
+            <a:off x="566928" y="5687568"/>
+            <a:ext cx="11064240" cy="621792"/>
           </a:xfrm>
           <a:prstGeom prst="rect">
             <a:avLst/>
@@ -18211,14 +19790,14 @@
                 <a:latin typeface="Calibri"/>
                 <a:ea typeface="Calibri"/>
               </a:rPr>
-              <a:t>Do not: TikTok, Pinterest, Xiaohongshu for Europe, Facebook as a daily channel. Accounts may exist. They are not scheduled or scored.</a:t>
-            </a:r>
-          </a:p>
-        </p:txBody>
-      </p:sp>
-      <p:sp>
-        <p:nvSpPr>
-          <p:cNvPr id="49" name="TextBox 48"/>
+              <a:t>Facebook is for watching competitors, not a daily channel. No TikTok / Xiaohongshu for Europe. AI may draft copy. A person publishes.</a:t>
+            </a:r>
+          </a:p>
+        </p:txBody>
+      </p:sp>
+      <p:sp>
+        <p:nvSpPr>
+          <p:cNvPr id="59" name="TextBox 58"/>
           <p:cNvSpPr txBox="1"/>
           <p:nvPr/>
         </p:nvSpPr>
@@ -18259,7 +19838,7 @@
       </p:sp>
       <p:sp>
         <p:nvSpPr>
-          <p:cNvPr id="50" name="TextBox 49"/>
+          <p:cNvPr id="60" name="TextBox 59"/>
           <p:cNvSpPr txBox="1"/>
           <p:nvPr/>
         </p:nvSpPr>
@@ -18293,14 +19872,14 @@
                 <a:latin typeface="Calibri"/>
                 <a:ea typeface="Calibri"/>
               </a:rPr>
-              <a:t>6 / 11</a:t>
-            </a:r>
-          </a:p>
-        </p:txBody>
-      </p:sp>
-      <p:sp>
-        <p:nvSpPr>
-          <p:cNvPr id="51" name="Rectangle 50"/>
+              <a:t>6 / 12</a:t>
+            </a:r>
+          </a:p>
+        </p:txBody>
+      </p:sp>
+      <p:sp>
+        <p:nvSpPr>
+          <p:cNvPr id="61" name="Rectangle 60"/>
           <p:cNvSpPr/>
           <p:nvPr/>
         </p:nvSpPr>
@@ -19652,7 +21231,7 @@
                 <a:latin typeface="Calibri"/>
                 <a:ea typeface="Calibri"/>
               </a:rPr>
-              <a:t>7 / 11</a:t>
+              <a:t>7 / 12</a:t>
             </a:r>
           </a:p>
         </p:txBody>
@@ -20596,7 +22175,7 @@
                 <a:latin typeface="Calibri"/>
                 <a:ea typeface="Calibri"/>
               </a:rPr>
-              <a:t>8 / 11</a:t>
+              <a:t>8 / 12</a:t>
             </a:r>
           </a:p>
         </p:txBody>
@@ -24040,7 +25619,7 @@
                 <a:latin typeface="Calibri"/>
                 <a:ea typeface="Calibri"/>
               </a:rPr>
-              <a:t>9 / 11</a:t>
+              <a:t>9 / 12</a:t>
             </a:r>
           </a:p>
         </p:txBody>
